--- a/docs/advisory/deck/冠松01楼-招商合作-会上版.pptx
+++ b/docs/advisory/deck/冠松01楼-招商合作-会上版.pptx
@@ -3292,7 +3292,7 @@
                 <a:ea typeface="WenQuanYi Micro Hei"/>
                 <a:cs typeface="WenQuanYi Micro Hei"/>
               </a:rPr>
-              <a:t>合作协议讲收费 · 这几页讲思路 · 招到盖章才算完</a:t>
+              <a:t>先 90 天 · 包干 8 万 · 佣金跟中介同一把尺</a:t>
             </a:r>
           </a:p>
         </p:txBody>
@@ -3387,7 +3387,7 @@
                 <a:ea typeface="WenQuanYi Micro Hei"/>
                 <a:cs typeface="WenQuanYi Micro Hei"/>
               </a:rPr>
-              <a:t>配套：05b 商务简版（收费确认栏可当场填）</a:t>
+              <a:t>细版请看「工作版」12 页 · 05b 确认栏当场填</a:t>
             </a:r>
           </a:p>
         </p:txBody>
@@ -4359,7 +4359,7 @@
                 <a:ea typeface="WenQuanYi Micro Hei"/>
                 <a:cs typeface="WenQuanYi Micro Hei"/>
               </a:rPr>
-              <a:t>思路</a:t>
+              <a:t>90 天</a:t>
             </a:r>
           </a:p>
         </p:txBody>
@@ -4399,7 +4399,7 @@
                 <a:ea typeface="WenQuanYi Micro Hei"/>
                 <a:cs typeface="WenQuanYi Micro Hei"/>
               </a:rPr>
-              <a:t>招谁、怎么招</a:t>
+              <a:t>未来 90 天怎么干</a:t>
             </a:r>
           </a:p>
         </p:txBody>
@@ -4439,7 +4439,7 @@
                 <a:ea typeface="WenQuanYi Micro Hei"/>
                 <a:cs typeface="WenQuanYi Micro Hei"/>
               </a:rPr>
-              <a:t>C6 教育科研用地是硬约束。地上不能按 4S 店来用。</a:t>
+              <a:t>必须：库 150 · 深接触 8 · 带看 5 · 书面意向 3。达不到可不转正。</a:t>
             </a:r>
           </a:p>
         </p:txBody>
@@ -4575,7 +4575,7 @@
         <p:spPr>
           <a:xfrm>
             <a:off x="411480" y="1143000"/>
-            <a:ext cx="5577840" cy="4892040"/>
+            <a:ext cx="3657600" cy="4892040"/>
           </a:xfrm>
           <a:prstGeom prst="rect">
             <a:avLst/>
@@ -4617,7 +4617,7 @@
         <p:spPr>
           <a:xfrm>
             <a:off x="411480" y="1143000"/>
-            <a:ext cx="5577840" cy="502920"/>
+            <a:ext cx="3657600" cy="548640"/>
           </a:xfrm>
           <a:prstGeom prst="rect">
             <a:avLst/>
@@ -4659,7 +4659,7 @@
         <p:spPr>
           <a:xfrm>
             <a:off x="411480" y="1143000"/>
-            <a:ext cx="5577840" cy="502920"/>
+            <a:ext cx="3657600" cy="548640"/>
           </a:xfrm>
           <a:prstGeom prst="rect">
             <a:avLst/>
@@ -4685,7 +4685,7 @@
                 <a:ea typeface="WenQuanYi Micro Hei"/>
                 <a:cs typeface="WenQuanYi Micro Hei"/>
               </a:rPr>
-              <a:t>招谁</a:t>
+              <a:t>D1–30 进场</a:t>
             </a:r>
           </a:p>
         </p:txBody>
@@ -4698,8 +4698,8 @@
         </p:nvSpPr>
         <p:spPr>
           <a:xfrm>
-            <a:off x="640080" y="1828800"/>
-            <a:ext cx="5120640" cy="3931920"/>
+            <a:off x="594360" y="1920240"/>
+            <a:ext cx="3291840" cy="3840480"/>
           </a:xfrm>
           <a:prstGeom prst="rect">
             <a:avLst/>
@@ -4715,9 +4715,9 @@
           </a:bodyPr>
           <a:lstStyle/>
           <a:p>
-            <a:pPr algn="l"/>
-            <a:r>
-              <a:rPr sz="1600" b="0" i="0">
+            <a:pPr algn="ctr"/>
+            <a:r>
+              <a:rPr sz="1800" b="0" i="0">
                 <a:solidFill>
                   <a:srgbClr val="2A2D34"/>
                 </a:solidFill>
@@ -4725,13 +4725,13 @@
                 <a:ea typeface="WenQuanYi Micro Hei"/>
                 <a:cs typeface="WenQuanYi Micro Hei"/>
               </a:rPr>
-              <a:t>优先：AI / 集成电路 / 智能机器人研发</a:t>
-            </a:r>
-          </a:p>
-          <a:p>
-            <a:pPr algn="l"/>
-            <a:r>
-              <a:rPr sz="1600" b="0" i="0">
+              <a:t>一页楼书（C6 / 层高）</a:t>
+            </a:r>
+          </a:p>
+          <a:p>
+            <a:pPr algn="ctr"/>
+            <a:r>
+              <a:rPr sz="1800" b="0" i="0">
                 <a:solidFill>
                   <a:srgbClr val="2A2D34"/>
                 </a:solidFill>
@@ -4739,13 +4739,13 @@
                 <a:ea typeface="WenQuanYi Micro Hei"/>
                 <a:cs typeface="WenQuanYi Micro Hei"/>
               </a:rPr>
-              <a:t>可组合：生物医药研发、汽车配套研发</a:t>
-            </a:r>
-          </a:p>
-          <a:p>
-            <a:pPr algn="l"/>
-            <a:r>
-              <a:rPr sz="1600" b="0" i="0">
+              <a:t>看房动线、种子库</a:t>
+            </a:r>
+          </a:p>
+          <a:p>
+            <a:pPr algn="ctr"/>
+            <a:r>
+              <a:rPr sz="1800" b="0" i="0">
                 <a:solidFill>
                   <a:srgbClr val="2A2D34"/>
                 </a:solidFill>
@@ -4753,13 +4753,13 @@
                 <a:ea typeface="WenQuanYi Micro Hei"/>
                 <a:cs typeface="WenQuanYi Micro Hei"/>
               </a:rPr>
-              <a:t/>
-            </a:r>
-          </a:p>
-          <a:p>
-            <a:pPr algn="l"/>
-            <a:r>
-              <a:rPr sz="1600" b="0" i="0">
+              <a:t>中介先开 2 家</a:t>
+            </a:r>
+          </a:p>
+          <a:p>
+            <a:pPr algn="ctr"/>
+            <a:r>
+              <a:rPr sz="1800" b="0" i="0">
                 <a:solidFill>
                   <a:srgbClr val="2A2D34"/>
                 </a:solidFill>
@@ -4767,49 +4767,7 @@
                 <a:ea typeface="WenQuanYi Micro Hei"/>
                 <a:cs typeface="WenQuanYi Micro Hei"/>
               </a:rPr>
-              <a:t>不招：整车 4S、整车展厅、汽车卖场</a:t>
-            </a:r>
-          </a:p>
-          <a:p>
-            <a:pPr algn="l"/>
-            <a:r>
-              <a:rPr sz="1600" b="0" i="0">
-                <a:solidFill>
-                  <a:srgbClr val="2A2D34"/>
-                </a:solidFill>
-                <a:latin typeface="Georgia"/>
-                <a:ea typeface="WenQuanYi Micro Hei"/>
-                <a:cs typeface="WenQuanYi Micro Hei"/>
-              </a:rPr>
-              <a:t>先不承诺：公寓（C6 要先做合规）</a:t>
-            </a:r>
-          </a:p>
-          <a:p>
-            <a:pPr algn="l"/>
-            <a:r>
-              <a:rPr sz="1600" b="0" i="0">
-                <a:solidFill>
-                  <a:srgbClr val="2A2D34"/>
-                </a:solidFill>
-                <a:latin typeface="Georgia"/>
-                <a:ea typeface="WenQuanYi Micro Hei"/>
-                <a:cs typeface="WenQuanYi Micro Hei"/>
-              </a:rPr>
-              <a:t/>
-            </a:r>
-          </a:p>
-          <a:p>
-            <a:pPr algn="l"/>
-            <a:r>
-              <a:rPr sz="1600" b="0" i="0">
-                <a:solidFill>
-                  <a:srgbClr val="2A2D34"/>
-                </a:solidFill>
-                <a:latin typeface="Georgia"/>
-                <a:ea typeface="WenQuanYi Micro Hei"/>
-                <a:cs typeface="WenQuanYi Micro Hei"/>
-              </a:rPr>
-              <a:t>1F+2F 高空间做展示和接待，甲方自留或冠名</a:t>
+              <a:t>周五周报</a:t>
             </a:r>
           </a:p>
         </p:txBody>
@@ -4822,8 +4780,8 @@
         </p:nvSpPr>
         <p:spPr>
           <a:xfrm>
-            <a:off x="6217920" y="1143000"/>
-            <a:ext cx="5577840" cy="4892040"/>
+            <a:off x="4251960" y="1143000"/>
+            <a:ext cx="3657600" cy="4892040"/>
           </a:xfrm>
           <a:prstGeom prst="rect">
             <a:avLst/>
@@ -4864,14 +4822,14 @@
         </p:nvSpPr>
         <p:spPr>
           <a:xfrm>
-            <a:off x="6217920" y="1143000"/>
-            <a:ext cx="5577840" cy="502920"/>
+            <a:off x="4251960" y="1143000"/>
+            <a:ext cx="3657600" cy="548640"/>
           </a:xfrm>
           <a:prstGeom prst="rect">
             <a:avLst/>
           </a:prstGeom>
           <a:solidFill>
-            <a:srgbClr val="B7862E"/>
+            <a:srgbClr val="1B3555"/>
           </a:solidFill>
           <a:ln>
             <a:noFill/>
@@ -4906,8 +4864,8 @@
         </p:nvSpPr>
         <p:spPr>
           <a:xfrm>
-            <a:off x="6217920" y="1143000"/>
-            <a:ext cx="5577840" cy="502920"/>
+            <a:off x="4251960" y="1143000"/>
+            <a:ext cx="3657600" cy="548640"/>
           </a:xfrm>
           <a:prstGeom prst="rect">
             <a:avLst/>
@@ -4927,13 +4885,13 @@
             <a:r>
               <a:rPr sz="1800" b="1" i="0">
                 <a:solidFill>
-                  <a:srgbClr val="1B3555"/>
-                </a:solidFill>
-                <a:latin typeface="Georgia"/>
-                <a:ea typeface="WenQuanYi Micro Hei"/>
-                <a:cs typeface="WenQuanYi Micro Hei"/>
-              </a:rPr>
-              <a:t>怎么招</a:t>
+                  <a:srgbClr val="FFFFFF"/>
+                </a:solidFill>
+                <a:latin typeface="Georgia"/>
+                <a:ea typeface="WenQuanYi Micro Hei"/>
+                <a:cs typeface="WenQuanYi Micro Hei"/>
+              </a:rPr>
+              <a:t>D31–60 见客</a:t>
             </a:r>
           </a:p>
         </p:txBody>
@@ -4946,8 +4904,8 @@
         </p:nvSpPr>
         <p:spPr>
           <a:xfrm>
-            <a:off x="6446520" y="1828800"/>
-            <a:ext cx="5120640" cy="3931920"/>
+            <a:off x="4434840" y="1920240"/>
+            <a:ext cx="3291840" cy="3840480"/>
           </a:xfrm>
           <a:prstGeom prst="rect">
             <a:avLst/>
@@ -4963,9 +4921,9 @@
           </a:bodyPr>
           <a:lstStyle/>
           <a:p>
-            <a:pPr algn="l"/>
-            <a:r>
-              <a:rPr sz="1600" b="0" i="0">
+            <a:pPr algn="ctr"/>
+            <a:r>
+              <a:rPr sz="1800" b="0" i="0">
                 <a:solidFill>
                   <a:srgbClr val="2A2D34"/>
                 </a:solidFill>
@@ -4973,13 +4931,13 @@
                 <a:ea typeface="WenQuanYi Micro Hei"/>
                 <a:cs typeface="WenQuanYi Micro Hei"/>
               </a:rPr>
-              <a:t>1  建库，决策人到人</a:t>
-            </a:r>
-          </a:p>
-          <a:p>
-            <a:pPr algn="l"/>
-            <a:r>
-              <a:rPr sz="1600" b="0" i="0">
+              <a:t>带看 + 48h 纪要</a:t>
+            </a:r>
+          </a:p>
+          <a:p>
+            <a:pPr algn="ctr"/>
+            <a:r>
+              <a:rPr sz="1800" b="0" i="0">
                 <a:solidFill>
                   <a:srgbClr val="2A2D34"/>
                 </a:solidFill>
@@ -4987,13 +4945,13 @@
                 <a:ea typeface="WenQuanYi Micro Hei"/>
                 <a:cs typeface="WenQuanYi Micro Hei"/>
               </a:rPr>
-              <a:t>2  拜访、带看，48 小时出纪要</a:t>
-            </a:r>
-          </a:p>
-          <a:p>
-            <a:pPr algn="l"/>
-            <a:r>
-              <a:rPr sz="1600" b="0" i="0">
+              <a:t>15 人闭门 1 场</a:t>
+            </a:r>
+          </a:p>
+          <a:p>
+            <a:pPr algn="ctr"/>
+            <a:r>
+              <a:rPr sz="1800" b="0" i="0">
                 <a:solidFill>
                   <a:srgbClr val="2A2D34"/>
                 </a:solidFill>
@@ -5001,13 +4959,13 @@
                 <a:ea typeface="WenQuanYi Micro Hei"/>
                 <a:cs typeface="WenQuanYi Micro Hei"/>
               </a:rPr>
-              <a:t>3  绿区直接报价，超线请示您</a:t>
-            </a:r>
-          </a:p>
-          <a:p>
-            <a:pPr algn="l"/>
-            <a:r>
-              <a:rPr sz="1600" b="0" i="0">
+              <a:t>只提市北、西岸</a:t>
+            </a:r>
+          </a:p>
+          <a:p>
+            <a:pPr algn="ctr"/>
+            <a:r>
+              <a:rPr sz="1800" b="0" i="0">
                 <a:solidFill>
                   <a:srgbClr val="2A2D34"/>
                 </a:solidFill>
@@ -5015,13 +4973,163 @@
                 <a:ea typeface="WenQuanYi Micro Hei"/>
                 <a:cs typeface="WenQuanYi Micro Hei"/>
               </a:rPr>
-              <a:t>4  统管中介，只留一套客户名单</a:t>
-            </a:r>
-          </a:p>
-          <a:p>
-            <a:pPr algn="l"/>
-            <a:r>
-              <a:rPr sz="1600" b="0" i="0">
+              <a:t>投促办备案不加码</a:t>
+            </a:r>
+          </a:p>
+        </p:txBody>
+      </p:sp>
+      <p:sp>
+        <p:nvSpPr>
+          <p:cNvPr id="17" name="Rectangle 16"/>
+          <p:cNvSpPr/>
+          <p:nvPr/>
+        </p:nvSpPr>
+        <p:spPr>
+          <a:xfrm>
+            <a:off x="8092440" y="1143000"/>
+            <a:ext cx="3657600" cy="4892040"/>
+          </a:xfrm>
+          <a:prstGeom prst="rect">
+            <a:avLst/>
+          </a:prstGeom>
+          <a:solidFill>
+            <a:srgbClr val="F0F1F3"/>
+          </a:solidFill>
+          <a:ln>
+            <a:noFill/>
+          </a:ln>
+          <a:effectLst/>
+        </p:spPr>
+        <p:style>
+          <a:lnRef idx="1">
+            <a:schemeClr val="accent1"/>
+          </a:lnRef>
+          <a:fillRef idx="3">
+            <a:schemeClr val="accent1"/>
+          </a:fillRef>
+          <a:effectRef idx="2">
+            <a:schemeClr val="accent1"/>
+          </a:effectRef>
+          <a:fontRef idx="minor">
+            <a:schemeClr val="lt1"/>
+          </a:fontRef>
+        </p:style>
+        <p:txBody>
+          <a:bodyPr rtlCol="0" anchor="ctr"/>
+          <a:lstStyle/>
+          <a:p/>
+        </p:txBody>
+      </p:sp>
+      <p:sp>
+        <p:nvSpPr>
+          <p:cNvPr id="18" name="Rectangle 17"/>
+          <p:cNvSpPr/>
+          <p:nvPr/>
+        </p:nvSpPr>
+        <p:spPr>
+          <a:xfrm>
+            <a:off x="8092440" y="1143000"/>
+            <a:ext cx="3657600" cy="548640"/>
+          </a:xfrm>
+          <a:prstGeom prst="rect">
+            <a:avLst/>
+          </a:prstGeom>
+          <a:solidFill>
+            <a:srgbClr val="1B3555"/>
+          </a:solidFill>
+          <a:ln>
+            <a:noFill/>
+          </a:ln>
+          <a:effectLst/>
+        </p:spPr>
+        <p:style>
+          <a:lnRef idx="1">
+            <a:schemeClr val="accent1"/>
+          </a:lnRef>
+          <a:fillRef idx="3">
+            <a:schemeClr val="accent1"/>
+          </a:fillRef>
+          <a:effectRef idx="2">
+            <a:schemeClr val="accent1"/>
+          </a:effectRef>
+          <a:fontRef idx="minor">
+            <a:schemeClr val="lt1"/>
+          </a:fontRef>
+        </p:style>
+        <p:txBody>
+          <a:bodyPr rtlCol="0" anchor="ctr"/>
+          <a:lstStyle/>
+          <a:p/>
+        </p:txBody>
+      </p:sp>
+      <p:sp>
+        <p:nvSpPr>
+          <p:cNvPr id="19" name="TextBox 18"/>
+          <p:cNvSpPr txBox="1"/>
+          <p:nvPr/>
+        </p:nvSpPr>
+        <p:spPr>
+          <a:xfrm>
+            <a:off x="8092440" y="1143000"/>
+            <a:ext cx="3657600" cy="548640"/>
+          </a:xfrm>
+          <a:prstGeom prst="rect">
+            <a:avLst/>
+          </a:prstGeom>
+          <a:noFill/>
+          <a:ln>
+            <a:noFill/>
+          </a:ln>
+        </p:spPr>
+        <p:txBody>
+          <a:bodyPr wrap="square" lIns="76200" rIns="76200" tIns="25400" bIns="25400" anchor="ctr">
+            <a:spAutoFit/>
+          </a:bodyPr>
+          <a:lstStyle/>
+          <a:p>
+            <a:pPr algn="ctr"/>
+            <a:r>
+              <a:rPr sz="1800" b="1" i="0">
+                <a:solidFill>
+                  <a:srgbClr val="FFFFFF"/>
+                </a:solidFill>
+                <a:latin typeface="Georgia"/>
+                <a:ea typeface="WenQuanYi Micro Hei"/>
+                <a:cs typeface="WenQuanYi Micro Hei"/>
+              </a:rPr>
+              <a:t>D61–90 收口</a:t>
+            </a:r>
+          </a:p>
+        </p:txBody>
+      </p:sp>
+      <p:sp>
+        <p:nvSpPr>
+          <p:cNvPr id="20" name="TextBox 19"/>
+          <p:cNvSpPr txBox="1"/>
+          <p:nvPr/>
+        </p:nvSpPr>
+        <p:spPr>
+          <a:xfrm>
+            <a:off x="8275320" y="1920240"/>
+            <a:ext cx="3291840" cy="3840480"/>
+          </a:xfrm>
+          <a:prstGeom prst="rect">
+            <a:avLst/>
+          </a:prstGeom>
+          <a:noFill/>
+          <a:ln>
+            <a:noFill/>
+          </a:ln>
+        </p:spPr>
+        <p:txBody>
+          <a:bodyPr wrap="square" lIns="76200" rIns="76200" tIns="25400" bIns="25400" anchor="t">
+            <a:spAutoFit/>
+          </a:bodyPr>
+          <a:lstStyle/>
+          <a:p>
+            <a:pPr algn="ctr"/>
+            <a:r>
+              <a:rPr sz="1800" b="0" i="0">
                 <a:solidFill>
                   <a:srgbClr val="2A2D34"/>
                 </a:solidFill>
@@ -5029,13 +5137,13 @@
                 <a:ea typeface="WenQuanYi Micro Hei"/>
                 <a:cs typeface="WenQuanYi Micro Hei"/>
               </a:rPr>
-              <a:t>5  盯到盖章、保证金到账</a:t>
-            </a:r>
-          </a:p>
-          <a:p>
-            <a:pPr algn="l"/>
-            <a:r>
-              <a:rPr sz="1600" b="0" i="0">
+              <a:t>意向写成书面</a:t>
+            </a:r>
+          </a:p>
+          <a:p>
+            <a:pPr algn="ctr"/>
+            <a:r>
+              <a:rPr sz="1800" b="0" i="0">
                 <a:solidFill>
                   <a:srgbClr val="2A2D34"/>
                 </a:solidFill>
@@ -5043,13 +5151,13 @@
                 <a:ea typeface="WenQuanYi Micro Hei"/>
                 <a:cs typeface="WenQuanYi Micro Hei"/>
               </a:rPr>
-              <a:t/>
-            </a:r>
-          </a:p>
-          <a:p>
-            <a:pPr algn="l"/>
-            <a:r>
-              <a:rPr sz="1600" b="0" i="0">
+              <a:t>黄区 48h 请示</a:t>
+            </a:r>
+          </a:p>
+          <a:p>
+            <a:pPr algn="ctr"/>
+            <a:r>
+              <a:rPr sz="1800" b="0" i="0">
                 <a:solidFill>
                   <a:srgbClr val="2A2D34"/>
                 </a:solidFill>
@@ -5057,7 +5165,21 @@
                 <a:ea typeface="WenQuanYi Micro Hei"/>
                 <a:cs typeface="WenQuanYi Micro Hei"/>
               </a:rPr>
-              <a:t>每周书面漏斗。出 PPT 不算完成。</a:t>
+              <a:t>漏斗会 90 分钟</a:t>
+            </a:r>
+          </a:p>
+          <a:p>
+            <a:pPr algn="ctr"/>
+            <a:r>
+              <a:rPr sz="1800" b="0" i="0">
+                <a:solidFill>
+                  <a:srgbClr val="2A2D34"/>
+                </a:solidFill>
+                <a:latin typeface="Georgia"/>
+                <a:ea typeface="WenQuanYi Micro Hei"/>
+                <a:cs typeface="WenQuanYi Micro Hei"/>
+              </a:rPr>
+              <a:t>转正 / 再试 / 停</a:t>
             </a:r>
           </a:p>
         </p:txBody>
@@ -5212,7 +5334,7 @@
                 <a:ea typeface="WenQuanYi Micro Hei"/>
                 <a:cs typeface="WenQuanYi Micro Hei"/>
               </a:rPr>
-              <a:t>三笔账 · 招到才抽佣</a:t>
+              <a:t>对齐后：试跑只付 8 万</a:t>
             </a:r>
           </a:p>
         </p:txBody>
@@ -5252,7 +5374,7 @@
                 <a:ea typeface="WenQuanYi Micro Hei"/>
                 <a:cs typeface="WenQuanYi Micro Hei"/>
               </a:rPr>
-              <a:t>建议口径，商务简版确认栏可改数字。未税，增值税另计。</a:t>
+              <a:t>旧口径 90 天约 39 万，叠了顾问费和满佣。现在跟中介同一把尺。</a:t>
             </a:r>
           </a:p>
         </p:txBody>
@@ -5498,7 +5620,7 @@
                 <a:ea typeface="WenQuanYi Micro Hei"/>
                 <a:cs typeface="WenQuanYi Micro Hei"/>
               </a:rPr>
-              <a:t>启动费</a:t>
+              <a:t>90 天包干</a:t>
             </a:r>
           </a:p>
         </p:txBody>
@@ -5538,7 +5660,7 @@
                 <a:ea typeface="WenQuanYi Micro Hei"/>
                 <a:cs typeface="WenQuanYi Micro Hei"/>
               </a:rPr>
-              <a:t>15 万</a:t>
+              <a:t>8 万</a:t>
             </a:r>
           </a:p>
         </p:txBody>
@@ -5578,7 +5700,7 @@
                 <a:ea typeface="WenQuanYi Micro Hei"/>
                 <a:cs typeface="WenQuanYi Micro Hei"/>
               </a:rPr>
-              <a:t>一次性 · 进场</a:t>
+              <a:t>含人、材料、带看</a:t>
             </a:r>
           </a:p>
           <a:p>
@@ -5592,7 +5714,7 @@
                 <a:ea typeface="WenQuanYi Micro Hei"/>
                 <a:cs typeface="WenQuanYi Micro Hei"/>
               </a:rPr>
-              <a:t>全额抵扣成功佣金</a:t>
+              <a:t>试跑期不另收月度</a:t>
             </a:r>
           </a:p>
         </p:txBody>
@@ -5716,7 +5838,7 @@
                 <a:ea typeface="WenQuanYi Micro Hei"/>
                 <a:cs typeface="WenQuanYi Micro Hei"/>
               </a:rPr>
-              <a:t>月度费</a:t>
+              <a:t>自拓佣金</a:t>
             </a:r>
           </a:p>
         </p:txBody>
@@ -5756,7 +5878,7 @@
                 <a:ea typeface="WenQuanYi Micro Hei"/>
                 <a:cs typeface="WenQuanYi Micro Hei"/>
               </a:rPr>
-              <a:t>8 万 / 月</a:t>
+              <a:t>首月 × 100%</a:t>
             </a:r>
           </a:p>
         </p:txBody>
@@ -5796,7 +5918,7 @@
                 <a:ea typeface="WenQuanYi Micro Hei"/>
                 <a:cs typeface="WenQuanYi Micro Hei"/>
               </a:rPr>
-              <a:t>干活 · 3–4 人组</a:t>
+              <a:t>和中介同一尺</a:t>
             </a:r>
           </a:p>
           <a:p>
@@ -5810,7 +5932,7 @@
                 <a:ea typeface="WenQuanYi Micro Hei"/>
                 <a:cs typeface="WenQuanYi Micro Hei"/>
               </a:rPr>
-              <a:t>不含中介和活动硬成本</a:t>
+              <a:t>没签成不抽</a:t>
             </a:r>
           </a:p>
         </p:txBody>
@@ -5934,7 +6056,7 @@
                 <a:ea typeface="WenQuanYi Micro Hei"/>
                 <a:cs typeface="WenQuanYi Micro Hei"/>
               </a:rPr>
-              <a:t>成功佣金</a:t>
+              <a:t>锚定佣金</a:t>
             </a:r>
           </a:p>
         </p:txBody>
@@ -5974,7 +6096,7 @@
                 <a:ea typeface="WenQuanYi Micro Hei"/>
                 <a:cs typeface="WenQuanYi Micro Hei"/>
               </a:rPr>
-              <a:t>8% / 链主 12%</a:t>
+              <a:t>首月 × 150%</a:t>
             </a:r>
           </a:p>
         </p:txBody>
@@ -6014,7 +6136,7 @@
                 <a:ea typeface="WenQuanYi Micro Hei"/>
                 <a:cs typeface="WenQuanYi Micro Hei"/>
               </a:rPr>
-              <a:t>首年租金为基数</a:t>
+              <a:t>≥ 1,500 ㎡ 或整层</a:t>
             </a:r>
           </a:p>
           <a:p>
@@ -6028,7 +6150,7 @@
                 <a:ea typeface="WenQuanYi Micro Hei"/>
                 <a:cs typeface="WenQuanYi Micro Hei"/>
               </a:rPr>
-              <a:t>扣免租 · 没签成不抽</a:t>
+              <a:t>中介单业主只付一套</a:t>
             </a:r>
           </a:p>
         </p:txBody>
@@ -6110,7 +6232,7 @@
                 <a:ea typeface="WenQuanYi Micro Hei"/>
                 <a:cs typeface="WenQuanYi Micro Hei"/>
               </a:rPr>
-              <a:t>和空置比：4,000 ㎡ 空一年，6.5 元/㎡·天，大约少收 949 万。</a:t>
+              <a:t>试跑无人成交，业主只出 8 万。转正后月度 4 万，当月有佣金则抵扣。</a:t>
             </a:r>
           </a:p>
           <a:p>
@@ -6124,7 +6246,7 @@
                 <a:ea typeface="WenQuanYi Micro Hei"/>
                 <a:cs typeface="WenQuanYi Micro Hei"/>
               </a:rPr>
-              <a:t>付给操盘方：月度 96 万 + 成功佣金约 57 万 ≈ 153 万。</a:t>
+              <a:t>中介成交：业主合计不超过该档，中介约 70% + 我们约 30%。</a:t>
             </a:r>
           </a:p>
           <a:p>
@@ -6138,7 +6260,7 @@
                 <a:ea typeface="WenQuanYi Micro Hei"/>
                 <a:cs typeface="WenQuanYi Micro Hei"/>
               </a:rPr>
-              <a:t>甲方自有未报备客户成交，不付成功佣金。中介佣金另付。</a:t>
+              <a:t>4,000 ㎡ 空一年大约少收 949 万。甲方自有未报备客户不付佣金。</a:t>
             </a:r>
           </a:p>
         </p:txBody>
@@ -6293,7 +6415,7 @@
                 <a:ea typeface="WenQuanYi Micro Hei"/>
                 <a:cs typeface="WenQuanYi Micro Hei"/>
               </a:rPr>
-              <a:t>可以先干 90 天</a:t>
+              <a:t>建议先勾 90 天</a:t>
             </a:r>
           </a:p>
         </p:txBody>
@@ -6333,7 +6455,7 @@
                 <a:ea typeface="WenQuanYi Micro Hei"/>
                 <a:cs typeface="WenQuanYi Micro Hei"/>
               </a:rPr>
-              <a:t>怕 12 个月锁死，就先看人干活。收费标准两套签法一样。</a:t>
+              <a:t>收费已经按试跑对齐。12 个月独家等看完人再锁。</a:t>
             </a:r>
           </a:p>
         </p:txBody>
@@ -6524,7 +6646,7 @@
                           <a:ea typeface="WenQuanYi Micro Hei"/>
                           <a:cs typeface="WenQuanYi Micro Hei"/>
                         </a:rPr>
-                        <a:t>方案 A · 12 个月独家（推荐）</a:t>
+                        <a:t>方案 B · 先 90 天（建议）</a:t>
                       </a:r>
                     </a:p>
                   </a:txBody>
@@ -6549,7 +6671,7 @@
                           <a:ea typeface="WenQuanYi Micro Hei"/>
                           <a:cs typeface="WenQuanYi Micro Hei"/>
                         </a:rPr>
-                        <a:t>方案 B · 先 90 天</a:t>
+                        <a:t>方案 A · 12 个月独家</a:t>
                       </a:r>
                     </a:p>
                   </a:txBody>
@@ -6599,7 +6721,7 @@
                           <a:ea typeface="WenQuanYi Micro Hei"/>
                           <a:cs typeface="WenQuanYi Micro Hei"/>
                         </a:rPr>
-                        <a:t>决心把楼租出去</a:t>
+                        <a:t>先看人干活</a:t>
                       </a:r>
                     </a:p>
                   </a:txBody>
@@ -6623,7 +6745,7 @@
                           <a:ea typeface="WenQuanYi Micro Hei"/>
                           <a:cs typeface="WenQuanYi Micro Hei"/>
                         </a:rPr>
-                        <a:t>想先看执行再锁独家</a:t>
+                        <a:t>已决心排他</a:t>
                       </a:r>
                     </a:p>
                   </a:txBody>
@@ -6649,7 +6771,7 @@
                           <a:ea typeface="WenQuanYi Micro Hei"/>
                           <a:cs typeface="WenQuanYi Micro Hei"/>
                         </a:rPr>
-                        <a:t>怎么停</a:t>
+                        <a:t>试跑费用</a:t>
                       </a:r>
                     </a:p>
                   </a:txBody>
@@ -6673,7 +6795,7 @@
                           <a:ea typeface="WenQuanYi Micro Hei"/>
                           <a:cs typeface="WenQuanYi Micro Hei"/>
                         </a:rPr>
-                        <a:t>满 6 个月没有锚定意向，可停月度费</a:t>
+                        <a:t>只付包干 8 万</a:t>
                       </a:r>
                     </a:p>
                   </a:txBody>
@@ -6697,7 +6819,7 @@
                           <a:ea typeface="WenQuanYi Micro Hei"/>
                           <a:cs typeface="WenQuanYi Micro Hei"/>
                         </a:rPr>
-                        <a:t>90 天到期可以不转正</a:t>
+                        <a:t>8 万记作前 90 天，之后月度 4 万</a:t>
                       </a:r>
                     </a:p>
                   </a:txBody>
@@ -6723,7 +6845,7 @@
                           <a:ea typeface="WenQuanYi Micro Hei"/>
                           <a:cs typeface="WenQuanYi Micro Hei"/>
                         </a:rPr>
-                        <a:t>合同章</a:t>
+                        <a:t>怎么停</a:t>
                       </a:r>
                     </a:p>
                   </a:txBody>
@@ -6747,7 +6869,7 @@
                           <a:ea typeface="WenQuanYi Micro Hei"/>
                           <a:cs typeface="WenQuanYi Micro Hei"/>
                         </a:rPr>
-                        <a:t>始终在您手里</a:t>
+                        <a:t>第 90 天可转正 / 再试 / 停</a:t>
                       </a:r>
                     </a:p>
                   </a:txBody>
@@ -6771,7 +6893,7 @@
                           <a:ea typeface="WenQuanYi Micro Hei"/>
                           <a:cs typeface="WenQuanYi Micro Hei"/>
                         </a:rPr>
-                        <a:t>始终在您手里</a:t>
+                        <a:t>满 6 个月无锚定意向可停月度</a:t>
                       </a:r>
                     </a:p>
                   </a:txBody>
@@ -6797,7 +6919,7 @@
                           <a:ea typeface="WenQuanYi Micro Hei"/>
                           <a:cs typeface="WenQuanYi Micro Hei"/>
                         </a:rPr>
-                        <a:t>报价</a:t>
+                        <a:t>合同章 / 报价</a:t>
                       </a:r>
                     </a:p>
                   </a:txBody>
@@ -6821,7 +6943,7 @@
                           <a:ea typeface="WenQuanYi Micro Hei"/>
                           <a:cs typeface="WenQuanYi Micro Hei"/>
                         </a:rPr>
-                        <a:t>绿区我们直接报，黄区 48 小时您批</a:t>
+                        <a:t>您盖章 · 绿区我们直接报</a:t>
                       </a:r>
                     </a:p>
                   </a:txBody>
@@ -7417,7 +7539,7 @@
                 <a:ea typeface="WenQuanYi Micro Hei"/>
                 <a:cs typeface="WenQuanYi Micro Hei"/>
               </a:rPr>
-              <a:t>A 十二个月独家，或 B 先九十天。</a:t>
+              <a:t>建议 B：先 90 天。</a:t>
             </a:r>
           </a:p>
         </p:txBody>
@@ -7512,7 +7634,7 @@
                 <a:ea typeface="WenQuanYi Micro Hei"/>
                 <a:cs typeface="WenQuanYi Micro Hei"/>
               </a:rPr>
-              <a:t>三个数</a:t>
+              <a:t>收费</a:t>
             </a:r>
           </a:p>
         </p:txBody>
@@ -7552,7 +7674,7 @@
                 <a:ea typeface="WenQuanYi Micro Hei"/>
                 <a:cs typeface="WenQuanYi Micro Hei"/>
               </a:rPr>
-              <a:t>启动费 / 月度费 / 成功佣金。可按 15 万、8 万、8%·12% 先填。</a:t>
+              <a:t>包干 8 万 · 首月 100% / 锚定 150%。</a:t>
             </a:r>
           </a:p>
         </p:txBody>

--- a/docs/advisory/deck/冠松01楼-招商合作-会上版.pptx
+++ b/docs/advisory/deck/冠松01楼-招商合作-会上版.pptx
@@ -3292,7 +3292,7 @@
                 <a:ea typeface="WenQuanYi Micro Hei"/>
                 <a:cs typeface="WenQuanYi Micro Hei"/>
               </a:rPr>
-              <a:t>先 90 天 · 包干 8 万 · 佣金跟中介同一把尺</a:t>
+              <a:t>先 90 天 · 启动 15 万 + 月度 8 万 + 首年租金 8%</a:t>
             </a:r>
           </a:p>
         </p:txBody>
@@ -5334,7 +5334,7 @@
                 <a:ea typeface="WenQuanYi Micro Hei"/>
                 <a:cs typeface="WenQuanYi Micro Hei"/>
               </a:rPr>
-              <a:t>对齐后：试跑只付 8 万</a:t>
+              <a:t>还是这三笔，柔和一点</a:t>
             </a:r>
           </a:p>
         </p:txBody>
@@ -5374,7 +5374,7 @@
                 <a:ea typeface="WenQuanYi Micro Hei"/>
                 <a:cs typeface="WenQuanYi Micro Hei"/>
               </a:rPr>
-              <a:t>旧口径 90 天约 39 万，叠了顾问费和满佣。现在跟中介同一把尺。</a:t>
+              <a:t>数字不改方向。启动费抵佣金、首月含在启动费里、有成交抵月度、链主不上浮。</a:t>
             </a:r>
           </a:p>
         </p:txBody>
@@ -5620,7 +5620,7 @@
                 <a:ea typeface="WenQuanYi Micro Hei"/>
                 <a:cs typeface="WenQuanYi Micro Hei"/>
               </a:rPr>
-              <a:t>90 天包干</a:t>
+              <a:t>启动费</a:t>
             </a:r>
           </a:p>
         </p:txBody>
@@ -5660,7 +5660,7 @@
                 <a:ea typeface="WenQuanYi Micro Hei"/>
                 <a:cs typeface="WenQuanYi Micro Hei"/>
               </a:rPr>
-              <a:t>8 万</a:t>
+              <a:t>15 万</a:t>
             </a:r>
           </a:p>
         </p:txBody>
@@ -5700,7 +5700,7 @@
                 <a:ea typeface="WenQuanYi Micro Hei"/>
                 <a:cs typeface="WenQuanYi Micro Hei"/>
               </a:rPr>
-              <a:t>含人、材料、带看</a:t>
+              <a:t>一次性进场</a:t>
             </a:r>
           </a:p>
           <a:p>
@@ -5714,7 +5714,7 @@
                 <a:ea typeface="WenQuanYi Micro Hei"/>
                 <a:cs typeface="WenQuanYi Micro Hei"/>
               </a:rPr>
-              <a:t>试跑期不另收月度</a:t>
+              <a:t>含第一个月 · 抵扣佣金</a:t>
             </a:r>
           </a:p>
         </p:txBody>
@@ -5838,7 +5838,7 @@
                 <a:ea typeface="WenQuanYi Micro Hei"/>
                 <a:cs typeface="WenQuanYi Micro Hei"/>
               </a:rPr>
-              <a:t>自拓佣金</a:t>
+              <a:t>月度费</a:t>
             </a:r>
           </a:p>
         </p:txBody>
@@ -5878,7 +5878,7 @@
                 <a:ea typeface="WenQuanYi Micro Hei"/>
                 <a:cs typeface="WenQuanYi Micro Hei"/>
               </a:rPr>
-              <a:t>首月 × 100%</a:t>
+              <a:t>8 万 / 月</a:t>
             </a:r>
           </a:p>
         </p:txBody>
@@ -5918,7 +5918,7 @@
                 <a:ea typeface="WenQuanYi Micro Hei"/>
                 <a:cs typeface="WenQuanYi Micro Hei"/>
               </a:rPr>
-              <a:t>和中介同一尺</a:t>
+              <a:t>第 2 个月起</a:t>
             </a:r>
           </a:p>
           <a:p>
@@ -5932,7 +5932,7 @@
                 <a:ea typeface="WenQuanYi Micro Hei"/>
                 <a:cs typeface="WenQuanYi Micro Hei"/>
               </a:rPr>
-              <a:t>没签成不抽</a:t>
+              <a:t>当月有佣金则抵扣</a:t>
             </a:r>
           </a:p>
         </p:txBody>
@@ -6056,7 +6056,7 @@
                 <a:ea typeface="WenQuanYi Micro Hei"/>
                 <a:cs typeface="WenQuanYi Micro Hei"/>
               </a:rPr>
-              <a:t>锚定佣金</a:t>
+              <a:t>成功佣金</a:t>
             </a:r>
           </a:p>
         </p:txBody>
@@ -6096,7 +6096,7 @@
                 <a:ea typeface="WenQuanYi Micro Hei"/>
                 <a:cs typeface="WenQuanYi Micro Hei"/>
               </a:rPr>
-              <a:t>首月 × 150%</a:t>
+              <a:t>首年租金 8%</a:t>
             </a:r>
           </a:p>
         </p:txBody>
@@ -6136,7 +6136,7 @@
                 <a:ea typeface="WenQuanYi Micro Hei"/>
                 <a:cs typeface="WenQuanYi Micro Hei"/>
               </a:rPr>
-              <a:t>≥ 1,500 ㎡ 或整层</a:t>
+              <a:t>扣税、物业、免租</a:t>
             </a:r>
           </a:p>
           <a:p>
@@ -6150,7 +6150,7 @@
                 <a:ea typeface="WenQuanYi Micro Hei"/>
                 <a:cs typeface="WenQuanYi Micro Hei"/>
               </a:rPr>
-              <a:t>中介单业主只付一套</a:t>
+              <a:t>链主也是 8% · 没签成不抽</a:t>
             </a:r>
           </a:p>
         </p:txBody>
@@ -6232,7 +6232,7 @@
                 <a:ea typeface="WenQuanYi Micro Hei"/>
                 <a:cs typeface="WenQuanYi Micro Hei"/>
               </a:rPr>
-              <a:t>试跑无人成交，业主只出 8 万。转正后月度 4 万，当月有佣金则抵扣。</a:t>
+              <a:t>中介带来的单，我们只按 8% 的一半（4%）计，不跟中介各收满额。</a:t>
             </a:r>
           </a:p>
           <a:p>
@@ -6246,7 +6246,7 @@
                 <a:ea typeface="WenQuanYi Micro Hei"/>
                 <a:cs typeface="WenQuanYi Micro Hei"/>
               </a:rPr>
-              <a:t>中介成交：业主合计不超过该档，中介约 70% + 我们约 30%。</a:t>
+              <a:t>试跑 90 天若无成交，现金约 15 + 16 = 31 万。达不到必须项可以不转正。</a:t>
             </a:r>
           </a:p>
           <a:p>
@@ -6455,7 +6455,7 @@
                 <a:ea typeface="WenQuanYi Micro Hei"/>
                 <a:cs typeface="WenQuanYi Micro Hei"/>
               </a:rPr>
-              <a:t>收费已经按试跑对齐。12 个月独家等看完人再锁。</a:t>
+              <a:t>收费仍是 15 万 + 8 万/月 + 8%。先看人干活，再锁 12 个月。</a:t>
             </a:r>
           </a:p>
         </p:txBody>
@@ -6771,7 +6771,7 @@
                           <a:ea typeface="WenQuanYi Micro Hei"/>
                           <a:cs typeface="WenQuanYi Micro Hei"/>
                         </a:rPr>
-                        <a:t>试跑费用</a:t>
+                        <a:t>收费</a:t>
                       </a:r>
                     </a:p>
                   </a:txBody>
@@ -6795,7 +6795,7 @@
                           <a:ea typeface="WenQuanYi Micro Hei"/>
                           <a:cs typeface="WenQuanYi Micro Hei"/>
                         </a:rPr>
-                        <a:t>只付包干 8 万</a:t>
+                        <a:t>三笔账全部适用</a:t>
                       </a:r>
                     </a:p>
                   </a:txBody>
@@ -6819,7 +6819,7 @@
                           <a:ea typeface="WenQuanYi Micro Hei"/>
                           <a:cs typeface="WenQuanYi Micro Hei"/>
                         </a:rPr>
-                        <a:t>8 万记作前 90 天，之后月度 4 万</a:t>
+                        <a:t>同样</a:t>
                       </a:r>
                     </a:p>
                   </a:txBody>
@@ -7674,7 +7674,7 @@
                 <a:ea typeface="WenQuanYi Micro Hei"/>
                 <a:cs typeface="WenQuanYi Micro Hei"/>
               </a:rPr>
-              <a:t>包干 8 万 · 首月 100% / 锚定 150%。</a:t>
+              <a:t>启动 15 万 · 月度 8 万 · 首年租金 8%。</a:t>
             </a:r>
           </a:p>
         </p:txBody>
